--- a/ppt/X25166484_smart-port-container-terminal.pptx
+++ b/ppt/X25166484_smart-port-container-terminal.pptx
@@ -3095,60 +3095,14 @@
       <p:grpSpPr/>
       <p:sp>
         <p:nvSpPr>
-          <p:cNvPr id="2" name="Rounded Rectangle 1"/>
+          <p:cNvPr id="2" name="Rectangle 1"/>
           <p:cNvSpPr/>
           <p:nvPr/>
         </p:nvSpPr>
         <p:spPr>
           <a:xfrm>
-            <a:off x="1371600" y="1280160"/>
-            <a:ext cx="9445752" cy="4297680"/>
-          </a:xfrm>
-          <a:prstGeom prst="roundRect">
-            <a:avLst/>
-          </a:prstGeom>
-          <a:solidFill>
-            <a:srgbClr val="E4E7ED"/>
-          </a:solidFill>
-          <a:ln w="19050">
-            <a:solidFill>
-              <a:srgbClr val="1F3F6B"/>
-            </a:solidFill>
-          </a:ln>
-          <a:effectLst/>
-        </p:spPr>
-        <p:style>
-          <a:lnRef idx="1">
-            <a:schemeClr val="accent1"/>
-          </a:lnRef>
-          <a:fillRef idx="3">
-            <a:schemeClr val="accent1"/>
-          </a:fillRef>
-          <a:effectRef idx="2">
-            <a:schemeClr val="accent1"/>
-          </a:effectRef>
-          <a:fontRef idx="minor">
-            <a:schemeClr val="lt1"/>
-          </a:fontRef>
-        </p:style>
-        <p:txBody>
-          <a:bodyPr rtlCol="0" anchor="ctr"/>
-          <a:lstStyle/>
-          <a:p>
-            <a:pPr algn="ctr"/>
-          </a:p>
-        </p:txBody>
-      </p:sp>
-      <p:sp>
-        <p:nvSpPr>
-          <p:cNvPr id="3" name="Rectangle 2"/>
-          <p:cNvSpPr/>
-          <p:nvPr/>
-        </p:nvSpPr>
-        <p:spPr>
-          <a:xfrm>
-            <a:off x="1371600" y="1280160"/>
-            <a:ext cx="9445752" cy="146304"/>
+            <a:off x="-91440" y="-91440"/>
+            <a:ext cx="12435840" cy="7040880"/>
           </a:xfrm>
           <a:prstGeom prst="rect">
             <a:avLst/>
@@ -3185,14 +3139,58 @@
       </p:sp>
       <p:sp>
         <p:nvSpPr>
+          <p:cNvPr id="3" name="Oval 2"/>
+          <p:cNvSpPr/>
+          <p:nvPr/>
+        </p:nvSpPr>
+        <p:spPr>
+          <a:xfrm>
+            <a:off x="5410504" y="731520"/>
+            <a:ext cx="1371600" cy="1371600"/>
+          </a:xfrm>
+          <a:prstGeom prst="ellipse">
+            <a:avLst/>
+          </a:prstGeom>
+          <a:solidFill>
+            <a:srgbClr val="FFFFFF"/>
+          </a:solidFill>
+          <a:ln>
+            <a:noFill/>
+          </a:ln>
+          <a:effectLst/>
+        </p:spPr>
+        <p:style>
+          <a:lnRef idx="1">
+            <a:schemeClr val="accent1"/>
+          </a:lnRef>
+          <a:fillRef idx="3">
+            <a:schemeClr val="accent1"/>
+          </a:fillRef>
+          <a:effectRef idx="2">
+            <a:schemeClr val="accent1"/>
+          </a:effectRef>
+          <a:fontRef idx="minor">
+            <a:schemeClr val="lt1"/>
+          </a:fontRef>
+        </p:style>
+        <p:txBody>
+          <a:bodyPr rtlCol="0" anchor="ctr"/>
+          <a:lstStyle/>
+          <a:p>
+            <a:pPr algn="ctr"/>
+          </a:p>
+        </p:txBody>
+      </p:sp>
+      <p:sp>
+        <p:nvSpPr>
           <p:cNvPr id="4" name="TextBox 3"/>
           <p:cNvSpPr txBox="1"/>
           <p:nvPr/>
         </p:nvSpPr>
         <p:spPr>
           <a:xfrm>
-            <a:off x="1920240" y="2103120"/>
-            <a:ext cx="8321040" cy="1371600"/>
+            <a:off x="5410504" y="731520"/>
+            <a:ext cx="1371600" cy="1371600"/>
           </a:xfrm>
           <a:prstGeom prst="rect">
             <a:avLst/>
@@ -3200,20 +3198,20 @@
           <a:noFill/>
         </p:spPr>
         <p:txBody>
-          <a:bodyPr wrap="square" anchor="ctr">
+          <a:bodyPr wrap="none" anchor="ctr">
             <a:spAutoFit/>
           </a:bodyPr>
           <a:lstStyle/>
           <a:p>
             <a:pPr algn="ctr"/>
             <a:r>
-              <a:rPr sz="2900" b="1">
+              <a:rPr sz="4500" b="1">
                 <a:solidFill>
                   <a:srgbClr val="1F3F6B"/>
                 </a:solidFill>
                 <a:latin typeface="Constantia"/>
               </a:rPr>
-              <a:t>Smart Port Container Terminal Monitoring</a:t>
+              <a:t>SP</a:t>
             </a:r>
           </a:p>
         </p:txBody>
@@ -3226,8 +3224,8 @@
         </p:nvSpPr>
         <p:spPr>
           <a:xfrm>
-            <a:off x="1920240" y="3383280"/>
-            <a:ext cx="8321040" cy="1828800"/>
+            <a:off x="914400" y="2514600"/>
+            <a:ext cx="10332720" cy="1554480"/>
           </a:xfrm>
           <a:prstGeom prst="rect">
             <a:avLst/>
@@ -3235,6 +3233,41 @@
           <a:noFill/>
         </p:spPr>
         <p:txBody>
+          <a:bodyPr wrap="square" anchor="ctr">
+            <a:spAutoFit/>
+          </a:bodyPr>
+          <a:lstStyle/>
+          <a:p>
+            <a:pPr algn="ctr"/>
+            <a:r>
+              <a:rPr sz="3400" b="1" i="0">
+                <a:solidFill>
+                  <a:srgbClr val="FFFFFF"/>
+                </a:solidFill>
+                <a:latin typeface="Constantia"/>
+              </a:rPr>
+              <a:t>Smart Port Container Terminal Monitoring</a:t>
+            </a:r>
+          </a:p>
+        </p:txBody>
+      </p:sp>
+      <p:sp>
+        <p:nvSpPr>
+          <p:cNvPr id="6" name="TextBox 5"/>
+          <p:cNvSpPr txBox="1"/>
+          <p:nvPr/>
+        </p:nvSpPr>
+        <p:spPr>
+          <a:xfrm>
+            <a:off x="1371600" y="3977639"/>
+            <a:ext cx="9418320" cy="548640"/>
+          </a:xfrm>
+          <a:prstGeom prst="rect">
+            <a:avLst/>
+          </a:prstGeom>
+          <a:noFill/>
+        </p:spPr>
+        <p:txBody>
           <a:bodyPr wrap="square" anchor="t">
             <a:spAutoFit/>
           </a:bodyPr>
@@ -3242,37 +3275,84 @@
           <a:p>
             <a:pPr algn="ctr"/>
             <a:r>
-              <a:rPr sz="1700" b="0">
-                <a:solidFill>
-                  <a:srgbClr val="5C655F"/>
+              <a:rPr sz="1800" b="0" i="1">
+                <a:solidFill>
+                  <a:srgbClr val="C0C9D5"/>
                 </a:solidFill>
                 <a:latin typeface="Georgia"/>
               </a:rPr>
               <a:t>Two-berth quayside safety monitor: fog windowing turns ten live sensor streams into crane, wind and cold-chain alerts, deployed live on AWS</a:t>
             </a:r>
           </a:p>
+        </p:txBody>
+      </p:sp>
+      <p:sp>
+        <p:nvSpPr>
+          <p:cNvPr id="7" name="TextBox 6"/>
+          <p:cNvSpPr txBox="1"/>
+          <p:nvPr/>
+        </p:nvSpPr>
+        <p:spPr>
+          <a:xfrm>
+            <a:off x="1371600" y="4892040"/>
+            <a:ext cx="9418320" cy="1463040"/>
+          </a:xfrm>
+          <a:prstGeom prst="rect">
+            <a:avLst/>
+          </a:prstGeom>
+          <a:noFill/>
+        </p:spPr>
+        <p:txBody>
+          <a:bodyPr wrap="square" anchor="t">
+            <a:spAutoFit/>
+          </a:bodyPr>
+          <a:lstStyle/>
           <a:p>
             <a:pPr algn="ctr"/>
             <a:r>
-              <a:rPr sz="1500" b="1">
-                <a:solidFill>
-                  <a:srgbClr val="232A26"/>
+              <a:rPr sz="1700" b="1" i="0">
+                <a:solidFill>
+                  <a:srgbClr val="FFFFFF"/>
                 </a:solidFill>
                 <a:latin typeface="Georgia"/>
               </a:rPr>
-              <a:t>Uday Kiran Reddy Dodda    Student ID X25166484</a:t>
+              <a:t>Uday Kiran Reddy Dodda</a:t>
             </a:r>
           </a:p>
           <a:p>
             <a:pPr algn="ctr"/>
             <a:r>
-              <a:rPr sz="1200" b="0">
-                <a:solidFill>
-                  <a:srgbClr val="5C655F"/>
+              <a:rPr sz="1300" b="0" i="0">
+                <a:solidFill>
+                  <a:srgbClr val="A9B6C6"/>
                 </a:solidFill>
                 <a:latin typeface="Georgia"/>
               </a:rPr>
-              <a:t>Fog and Edge Computing (H9FECC), National College of Ireland</a:t>
+              <a:t>Student ID X25166484</a:t>
+            </a:r>
+          </a:p>
+          <a:p>
+            <a:pPr algn="ctr"/>
+            <a:r>
+              <a:rPr sz="1250" b="0" i="0">
+                <a:solidFill>
+                  <a:srgbClr val="A9B6C6"/>
+                </a:solidFill>
+                <a:latin typeface="Georgia"/>
+              </a:rPr>
+              <a:t>MSc in Cloud Computing   ·   Fog and Edge Computing (H9FECC)</a:t>
+            </a:r>
+          </a:p>
+          <a:p>
+            <a:pPr algn="ctr"/>
+            <a:r>
+              <a:rPr sz="1250" b="0" i="0">
+                <a:solidFill>
+                  <a:srgbClr val="A9B6C6"/>
+                </a:solidFill>
+                <a:latin typeface="Georgia"/>
+              </a:rPr>
+              <a:t>National College of Ireland</a:t>
             </a:r>
           </a:p>
         </p:txBody>

--- a/ppt/X25166484_smart-port-container-terminal.pptx
+++ b/ppt/X25166484_smart-port-container-terminal.pptx
@@ -4684,7 +4684,7 @@
                 </a:solidFill>
                 <a:latin typeface="Georgia"/>
               </a:rPr>
-              <a:t>Every alert on screen traces to a real, code-defined threshold, verified end to end by 86 automated tests.</a:t>
+              <a:t>Every alert on screen traces to a real, code-defined threshold, verified end to end by 95 automated tests.</a:t>
             </a:r>
           </a:p>
           <a:p>

--- a/ppt/X25166484_smart-port-container-terminal.pptx
+++ b/ppt/X25166484_smart-port-container-terminal.pptx
@@ -3139,58 +3139,14 @@
       </p:sp>
       <p:sp>
         <p:nvSpPr>
-          <p:cNvPr id="3" name="Oval 2"/>
-          <p:cNvSpPr/>
+          <p:cNvPr id="3" name="TextBox 2"/>
+          <p:cNvSpPr txBox="1"/>
           <p:nvPr/>
         </p:nvSpPr>
         <p:spPr>
           <a:xfrm>
-            <a:off x="5410504" y="731520"/>
-            <a:ext cx="1371600" cy="1371600"/>
-          </a:xfrm>
-          <a:prstGeom prst="ellipse">
-            <a:avLst/>
-          </a:prstGeom>
-          <a:solidFill>
-            <a:srgbClr val="FFFFFF"/>
-          </a:solidFill>
-          <a:ln>
-            <a:noFill/>
-          </a:ln>
-          <a:effectLst/>
-        </p:spPr>
-        <p:style>
-          <a:lnRef idx="1">
-            <a:schemeClr val="accent1"/>
-          </a:lnRef>
-          <a:fillRef idx="3">
-            <a:schemeClr val="accent1"/>
-          </a:fillRef>
-          <a:effectRef idx="2">
-            <a:schemeClr val="accent1"/>
-          </a:effectRef>
-          <a:fontRef idx="minor">
-            <a:schemeClr val="lt1"/>
-          </a:fontRef>
-        </p:style>
-        <p:txBody>
-          <a:bodyPr rtlCol="0" anchor="ctr"/>
-          <a:lstStyle/>
-          <a:p>
-            <a:pPr algn="ctr"/>
-          </a:p>
-        </p:txBody>
-      </p:sp>
-      <p:sp>
-        <p:nvSpPr>
-          <p:cNvPr id="4" name="TextBox 3"/>
-          <p:cNvSpPr txBox="1"/>
-          <p:nvPr/>
-        </p:nvSpPr>
-        <p:spPr>
-          <a:xfrm>
-            <a:off x="5410504" y="731520"/>
-            <a:ext cx="1371600" cy="1371600"/>
+            <a:off x="914400" y="2011680"/>
+            <a:ext cx="10332720" cy="1783080"/>
           </a:xfrm>
           <a:prstGeom prst="rect">
             <a:avLst/>
@@ -3198,41 +3154,6 @@
           <a:noFill/>
         </p:spPr>
         <p:txBody>
-          <a:bodyPr wrap="none" anchor="ctr">
-            <a:spAutoFit/>
-          </a:bodyPr>
-          <a:lstStyle/>
-          <a:p>
-            <a:pPr algn="ctr"/>
-            <a:r>
-              <a:rPr sz="4500" b="1">
-                <a:solidFill>
-                  <a:srgbClr val="1F3F6B"/>
-                </a:solidFill>
-                <a:latin typeface="Constantia"/>
-              </a:rPr>
-              <a:t>SP</a:t>
-            </a:r>
-          </a:p>
-        </p:txBody>
-      </p:sp>
-      <p:sp>
-        <p:nvSpPr>
-          <p:cNvPr id="5" name="TextBox 4"/>
-          <p:cNvSpPr txBox="1"/>
-          <p:nvPr/>
-        </p:nvSpPr>
-        <p:spPr>
-          <a:xfrm>
-            <a:off x="914400" y="2514600"/>
-            <a:ext cx="10332720" cy="1554480"/>
-          </a:xfrm>
-          <a:prstGeom prst="rect">
-            <a:avLst/>
-          </a:prstGeom>
-          <a:noFill/>
-        </p:spPr>
-        <p:txBody>
           <a:bodyPr wrap="square" anchor="ctr">
             <a:spAutoFit/>
           </a:bodyPr>
@@ -3253,13 +3174,13 @@
       </p:sp>
       <p:sp>
         <p:nvSpPr>
-          <p:cNvPr id="6" name="TextBox 5"/>
+          <p:cNvPr id="4" name="TextBox 3"/>
           <p:cNvSpPr txBox="1"/>
           <p:nvPr/>
         </p:nvSpPr>
         <p:spPr>
           <a:xfrm>
-            <a:off x="1371600" y="3977639"/>
+            <a:off x="1371600" y="3840480"/>
             <a:ext cx="9418320" cy="548640"/>
           </a:xfrm>
           <a:prstGeom prst="rect">
@@ -3288,13 +3209,13 @@
       </p:sp>
       <p:sp>
         <p:nvSpPr>
-          <p:cNvPr id="7" name="TextBox 6"/>
+          <p:cNvPr id="5" name="TextBox 4"/>
           <p:cNvSpPr txBox="1"/>
           <p:nvPr/>
         </p:nvSpPr>
         <p:spPr>
           <a:xfrm>
-            <a:off x="1371600" y="4892040"/>
+            <a:off x="1371600" y="4709160"/>
             <a:ext cx="9418320" cy="1463040"/>
           </a:xfrm>
           <a:prstGeom prst="rect">
